--- a/docs/orbitas/orbita1/slides/pptx/orbita1_06_wireframes.pptx
+++ b/docs/orbitas/orbita1/slides/pptx/orbita1_06_wireframes.pptx
@@ -1213,7 +1213,7 @@
     <p:bg>
       <p:bgPr>
         <a:solidFill>
-          <a:srgbClr val="1A1A1A"/>
+          <a:srgbClr val="240509"/>
         </a:solidFill>
       </p:bgPr>
     </p:bg>
@@ -1278,7 +1278,7 @@
             <a:r>
               <a:rPr lang="en-US" sz="1400" b="1" dirty="0">
                 <a:solidFill>
-                  <a:srgbClr val="1A1A1A"/>
+                  <a:srgbClr val="240509"/>
                 </a:solidFill>
                 <a:latin typeface="Arial" pitchFamily="34" charset="0"/>
                 <a:ea typeface="Arial" pitchFamily="34" charset="-122"/>
@@ -1317,7 +1317,7 @@
             <a:r>
               <a:rPr lang="en-US" sz="4000" b="1" dirty="0">
                 <a:solidFill>
-                  <a:srgbClr val="FFFFFF"/>
+                  <a:srgbClr val="FBFBF8"/>
                 </a:solidFill>
                 <a:latin typeface="Arial" pitchFamily="34" charset="0"/>
                 <a:ea typeface="Arial" pitchFamily="34" charset="-122"/>
@@ -1356,7 +1356,7 @@
             <a:r>
               <a:rPr lang="en-US" sz="1800" dirty="0">
                 <a:solidFill>
-                  <a:srgbClr val="FFE156"/>
+                  <a:srgbClr val="F7D597"/>
                 </a:solidFill>
                 <a:latin typeface="Arial" pitchFamily="34" charset="0"/>
                 <a:ea typeface="Arial" pitchFamily="34" charset="-122"/>
@@ -1421,7 +1421,7 @@
     <p:bg>
       <p:bgPr>
         <a:solidFill>
-          <a:srgbClr val="FFFFFF"/>
+          <a:srgbClr val="FBFBF8"/>
         </a:solidFill>
       </p:bgPr>
     </p:bg>
@@ -1466,7 +1466,7 @@
             <a:r>
               <a:rPr lang="en-US" sz="2600" b="1" dirty="0">
                 <a:solidFill>
-                  <a:srgbClr val="1A1A1A"/>
+                  <a:srgbClr val="240509"/>
                 </a:solidFill>
                 <a:latin typeface="Arial" pitchFamily="34" charset="0"/>
                 <a:ea typeface="Arial" pitchFamily="34" charset="-122"/>
@@ -1525,7 +1525,7 @@
             <a:r>
               <a:rPr lang="en-US" sz="1800" b="1" dirty="0">
                 <a:solidFill>
-                  <a:srgbClr val="FFFFFF"/>
+                  <a:srgbClr val="FBFBF8"/>
                 </a:solidFill>
                 <a:latin typeface="Arial" pitchFamily="34" charset="0"/>
                 <a:ea typeface="Arial" pitchFamily="34" charset="-122"/>
@@ -1564,7 +1564,7 @@
             <a:r>
               <a:rPr lang="en-US" sz="1600" b="1" dirty="0">
                 <a:solidFill>
-                  <a:srgbClr val="1A1A1A"/>
+                  <a:srgbClr val="240509"/>
                 </a:solidFill>
                 <a:latin typeface="Arial" pitchFamily="34" charset="0"/>
                 <a:ea typeface="Arial" pitchFamily="34" charset="-122"/>
@@ -1603,7 +1603,7 @@
             <a:r>
               <a:rPr lang="en-US" sz="1300" dirty="0">
                 <a:solidFill>
-                  <a:srgbClr val="333333"/>
+                  <a:srgbClr val="4A5568"/>
                 </a:solidFill>
                 <a:latin typeface="Arial" pitchFamily="34" charset="0"/>
                 <a:ea typeface="Arial" pitchFamily="34" charset="-122"/>
@@ -1662,7 +1662,7 @@
             <a:r>
               <a:rPr lang="en-US" sz="1800" b="1" dirty="0">
                 <a:solidFill>
-                  <a:srgbClr val="FFFFFF"/>
+                  <a:srgbClr val="FBFBF8"/>
                 </a:solidFill>
                 <a:latin typeface="Arial" pitchFamily="34" charset="0"/>
                 <a:ea typeface="Arial" pitchFamily="34" charset="-122"/>
@@ -1701,7 +1701,7 @@
             <a:r>
               <a:rPr lang="en-US" sz="1600" b="1" dirty="0">
                 <a:solidFill>
-                  <a:srgbClr val="1A1A1A"/>
+                  <a:srgbClr val="240509"/>
                 </a:solidFill>
                 <a:latin typeface="Arial" pitchFamily="34" charset="0"/>
                 <a:ea typeface="Arial" pitchFamily="34" charset="-122"/>
@@ -1740,7 +1740,7 @@
             <a:r>
               <a:rPr lang="en-US" sz="1300" dirty="0">
                 <a:solidFill>
-                  <a:srgbClr val="333333"/>
+                  <a:srgbClr val="4A5568"/>
                 </a:solidFill>
                 <a:latin typeface="Arial" pitchFamily="34" charset="0"/>
                 <a:ea typeface="Arial" pitchFamily="34" charset="-122"/>
@@ -1766,7 +1766,7 @@
     <p:bg>
       <p:bgPr>
         <a:solidFill>
-          <a:srgbClr val="FFFFFF"/>
+          <a:srgbClr val="FBFBF8"/>
         </a:solidFill>
       </p:bgPr>
     </p:bg>
@@ -1811,7 +1811,7 @@
             <a:r>
               <a:rPr lang="en-US" sz="2600" b="1" dirty="0">
                 <a:solidFill>
-                  <a:srgbClr val="1A1A1A"/>
+                  <a:srgbClr val="240509"/>
                 </a:solidFill>
                 <a:latin typeface="Arial" pitchFamily="34" charset="0"/>
                 <a:ea typeface="Arial" pitchFamily="34" charset="-122"/>
@@ -1870,7 +1870,7 @@
             <a:r>
               <a:rPr lang="en-US" sz="1800" b="1" dirty="0">
                 <a:solidFill>
-                  <a:srgbClr val="FFFFFF"/>
+                  <a:srgbClr val="FBFBF8"/>
                 </a:solidFill>
                 <a:latin typeface="Arial" pitchFamily="34" charset="0"/>
                 <a:ea typeface="Arial" pitchFamily="34" charset="-122"/>
@@ -1909,7 +1909,7 @@
             <a:r>
               <a:rPr lang="en-US" sz="1600" b="1" dirty="0">
                 <a:solidFill>
-                  <a:srgbClr val="1A1A1A"/>
+                  <a:srgbClr val="240509"/>
                 </a:solidFill>
                 <a:latin typeface="Arial" pitchFamily="34" charset="0"/>
                 <a:ea typeface="Arial" pitchFamily="34" charset="-122"/>
@@ -1948,7 +1948,7 @@
             <a:r>
               <a:rPr lang="en-US" sz="1300" dirty="0">
                 <a:solidFill>
-                  <a:srgbClr val="333333"/>
+                  <a:srgbClr val="4A5568"/>
                 </a:solidFill>
                 <a:latin typeface="Arial" pitchFamily="34" charset="0"/>
                 <a:ea typeface="Arial" pitchFamily="34" charset="-122"/>
@@ -2007,7 +2007,7 @@
             <a:r>
               <a:rPr lang="en-US" sz="1800" b="1" dirty="0">
                 <a:solidFill>
-                  <a:srgbClr val="FFFFFF"/>
+                  <a:srgbClr val="FBFBF8"/>
                 </a:solidFill>
                 <a:latin typeface="Arial" pitchFamily="34" charset="0"/>
                 <a:ea typeface="Arial" pitchFamily="34" charset="-122"/>
@@ -2046,7 +2046,7 @@
             <a:r>
               <a:rPr lang="en-US" sz="1600" b="1" dirty="0">
                 <a:solidFill>
-                  <a:srgbClr val="1A1A1A"/>
+                  <a:srgbClr val="240509"/>
                 </a:solidFill>
                 <a:latin typeface="Arial" pitchFamily="34" charset="0"/>
                 <a:ea typeface="Arial" pitchFamily="34" charset="-122"/>
@@ -2085,7 +2085,7 @@
             <a:r>
               <a:rPr lang="en-US" sz="1300" dirty="0">
                 <a:solidFill>
-                  <a:srgbClr val="333333"/>
+                  <a:srgbClr val="4A5568"/>
                 </a:solidFill>
                 <a:latin typeface="Arial" pitchFamily="34" charset="0"/>
                 <a:ea typeface="Arial" pitchFamily="34" charset="-122"/>
@@ -2144,7 +2144,7 @@
             <a:r>
               <a:rPr lang="en-US" sz="1800" b="1" dirty="0">
                 <a:solidFill>
-                  <a:srgbClr val="FFFFFF"/>
+                  <a:srgbClr val="FBFBF8"/>
                 </a:solidFill>
                 <a:latin typeface="Arial" pitchFamily="34" charset="0"/>
                 <a:ea typeface="Arial" pitchFamily="34" charset="-122"/>
@@ -2183,7 +2183,7 @@
             <a:r>
               <a:rPr lang="en-US" sz="1600" b="1" dirty="0">
                 <a:solidFill>
-                  <a:srgbClr val="1A1A1A"/>
+                  <a:srgbClr val="240509"/>
                 </a:solidFill>
                 <a:latin typeface="Arial" pitchFamily="34" charset="0"/>
                 <a:ea typeface="Arial" pitchFamily="34" charset="-122"/>
@@ -2222,7 +2222,7 @@
             <a:r>
               <a:rPr lang="en-US" sz="1300" dirty="0">
                 <a:solidFill>
-                  <a:srgbClr val="333333"/>
+                  <a:srgbClr val="4A5568"/>
                 </a:solidFill>
                 <a:latin typeface="Arial" pitchFamily="34" charset="0"/>
                 <a:ea typeface="Arial" pitchFamily="34" charset="-122"/>
@@ -2248,7 +2248,7 @@
     <p:bg>
       <p:bgPr>
         <a:solidFill>
-          <a:srgbClr val="FFFFFF"/>
+          <a:srgbClr val="FBFBF8"/>
         </a:solidFill>
       </p:bgPr>
     </p:bg>
@@ -2293,7 +2293,7 @@
             <a:r>
               <a:rPr lang="en-US" sz="2600" b="1" dirty="0">
                 <a:solidFill>
-                  <a:srgbClr val="1A1A1A"/>
+                  <a:srgbClr val="240509"/>
                 </a:solidFill>
                 <a:latin typeface="Arial" pitchFamily="34" charset="0"/>
                 <a:ea typeface="Arial" pitchFamily="34" charset="-122"/>
@@ -2352,7 +2352,7 @@
             <a:r>
               <a:rPr lang="en-US" sz="1800" b="1" dirty="0">
                 <a:solidFill>
-                  <a:srgbClr val="FFFFFF"/>
+                  <a:srgbClr val="FBFBF8"/>
                 </a:solidFill>
                 <a:latin typeface="Arial" pitchFamily="34" charset="0"/>
                 <a:ea typeface="Arial" pitchFamily="34" charset="-122"/>
@@ -2391,7 +2391,7 @@
             <a:r>
               <a:rPr lang="en-US" sz="1600" b="1" dirty="0">
                 <a:solidFill>
-                  <a:srgbClr val="1A1A1A"/>
+                  <a:srgbClr val="240509"/>
                 </a:solidFill>
                 <a:latin typeface="Arial" pitchFamily="34" charset="0"/>
                 <a:ea typeface="Arial" pitchFamily="34" charset="-122"/>
@@ -2430,7 +2430,7 @@
             <a:r>
               <a:rPr lang="en-US" sz="1300" dirty="0">
                 <a:solidFill>
-                  <a:srgbClr val="333333"/>
+                  <a:srgbClr val="4A5568"/>
                 </a:solidFill>
                 <a:latin typeface="Arial" pitchFamily="34" charset="0"/>
                 <a:ea typeface="Arial" pitchFamily="34" charset="-122"/>
@@ -2489,7 +2489,7 @@
             <a:r>
               <a:rPr lang="en-US" sz="1800" b="1" dirty="0">
                 <a:solidFill>
-                  <a:srgbClr val="FFFFFF"/>
+                  <a:srgbClr val="FBFBF8"/>
                 </a:solidFill>
                 <a:latin typeface="Arial" pitchFamily="34" charset="0"/>
                 <a:ea typeface="Arial" pitchFamily="34" charset="-122"/>
@@ -2528,7 +2528,7 @@
             <a:r>
               <a:rPr lang="en-US" sz="1600" b="1" dirty="0">
                 <a:solidFill>
-                  <a:srgbClr val="1A1A1A"/>
+                  <a:srgbClr val="240509"/>
                 </a:solidFill>
                 <a:latin typeface="Arial" pitchFamily="34" charset="0"/>
                 <a:ea typeface="Arial" pitchFamily="34" charset="-122"/>
@@ -2567,7 +2567,7 @@
             <a:r>
               <a:rPr lang="en-US" sz="1300" dirty="0">
                 <a:solidFill>
-                  <a:srgbClr val="333333"/>
+                  <a:srgbClr val="4A5568"/>
                 </a:solidFill>
                 <a:latin typeface="Arial" pitchFamily="34" charset="0"/>
                 <a:ea typeface="Arial" pitchFamily="34" charset="-122"/>
@@ -2638,7 +2638,7 @@
             <a:r>
               <a:rPr lang="en-US" sz="1600" b="1" dirty="0">
                 <a:solidFill>
-                  <a:srgbClr val="1A1A1A"/>
+                  <a:srgbClr val="240509"/>
                 </a:solidFill>
                 <a:latin typeface="Arial" pitchFamily="34" charset="0"/>
                 <a:ea typeface="Arial" pitchFamily="34" charset="-122"/>
@@ -2677,7 +2677,7 @@
             <a:r>
               <a:rPr lang="en-US" sz="2400" b="1" dirty="0">
                 <a:solidFill>
-                  <a:srgbClr val="FFFFFF"/>
+                  <a:srgbClr val="FBFBF8"/>
                 </a:solidFill>
                 <a:latin typeface="Arial" pitchFamily="34" charset="0"/>
                 <a:ea typeface="Arial" pitchFamily="34" charset="-122"/>

--- a/docs/orbitas/orbita1/slides/pptx/orbita1_06_wireframes.pptx
+++ b/docs/orbitas/orbita1/slides/pptx/orbita1_06_wireframes.pptx
@@ -1213,7 +1213,7 @@
     <p:bg>
       <p:bgPr>
         <a:solidFill>
-          <a:srgbClr val="240509"/>
+          <a:srgbClr val="1F0318"/>
         </a:solidFill>
       </p:bgPr>
     </p:bg>
@@ -1278,7 +1278,7 @@
             <a:r>
               <a:rPr lang="en-US" sz="1400" b="1" dirty="0">
                 <a:solidFill>
-                  <a:srgbClr val="240509"/>
+                  <a:srgbClr val="1F0318"/>
                 </a:solidFill>
                 <a:latin typeface="Arial" pitchFamily="34" charset="0"/>
                 <a:ea typeface="Arial" pitchFamily="34" charset="-122"/>
@@ -1317,7 +1317,7 @@
             <a:r>
               <a:rPr lang="en-US" sz="4000" b="1" dirty="0">
                 <a:solidFill>
-                  <a:srgbClr val="FBFBF8"/>
+                  <a:srgbClr val="FFFFFF"/>
                 </a:solidFill>
                 <a:latin typeface="Arial" pitchFamily="34" charset="0"/>
                 <a:ea typeface="Arial" pitchFamily="34" charset="-122"/>
@@ -1356,7 +1356,7 @@
             <a:r>
               <a:rPr lang="en-US" sz="1800" dirty="0">
                 <a:solidFill>
-                  <a:srgbClr val="F7D597"/>
+                  <a:srgbClr val="FFB8DE"/>
                 </a:solidFill>
                 <a:latin typeface="Arial" pitchFamily="34" charset="0"/>
                 <a:ea typeface="Arial" pitchFamily="34" charset="-122"/>
@@ -1421,7 +1421,7 @@
     <p:bg>
       <p:bgPr>
         <a:solidFill>
-          <a:srgbClr val="FBFBF8"/>
+          <a:srgbClr val="FFFFFF"/>
         </a:solidFill>
       </p:bgPr>
     </p:bg>
@@ -1466,7 +1466,7 @@
             <a:r>
               <a:rPr lang="en-US" sz="2600" b="1" dirty="0">
                 <a:solidFill>
-                  <a:srgbClr val="240509"/>
+                  <a:srgbClr val="1F0318"/>
                 </a:solidFill>
                 <a:latin typeface="Arial" pitchFamily="34" charset="0"/>
                 <a:ea typeface="Arial" pitchFamily="34" charset="-122"/>
@@ -1525,7 +1525,7 @@
             <a:r>
               <a:rPr lang="en-US" sz="1800" b="1" dirty="0">
                 <a:solidFill>
-                  <a:srgbClr val="FBFBF8"/>
+                  <a:srgbClr val="FFFFFF"/>
                 </a:solidFill>
                 <a:latin typeface="Arial" pitchFamily="34" charset="0"/>
                 <a:ea typeface="Arial" pitchFamily="34" charset="-122"/>
@@ -1564,7 +1564,7 @@
             <a:r>
               <a:rPr lang="en-US" sz="1600" b="1" dirty="0">
                 <a:solidFill>
-                  <a:srgbClr val="240509"/>
+                  <a:srgbClr val="1F0318"/>
                 </a:solidFill>
                 <a:latin typeface="Arial" pitchFamily="34" charset="0"/>
                 <a:ea typeface="Arial" pitchFamily="34" charset="-122"/>
@@ -1662,7 +1662,7 @@
             <a:r>
               <a:rPr lang="en-US" sz="1800" b="1" dirty="0">
                 <a:solidFill>
-                  <a:srgbClr val="FBFBF8"/>
+                  <a:srgbClr val="FFFFFF"/>
                 </a:solidFill>
                 <a:latin typeface="Arial" pitchFamily="34" charset="0"/>
                 <a:ea typeface="Arial" pitchFamily="34" charset="-122"/>
@@ -1701,7 +1701,7 @@
             <a:r>
               <a:rPr lang="en-US" sz="1600" b="1" dirty="0">
                 <a:solidFill>
-                  <a:srgbClr val="240509"/>
+                  <a:srgbClr val="1F0318"/>
                 </a:solidFill>
                 <a:latin typeface="Arial" pitchFamily="34" charset="0"/>
                 <a:ea typeface="Arial" pitchFamily="34" charset="-122"/>
@@ -1766,7 +1766,7 @@
     <p:bg>
       <p:bgPr>
         <a:solidFill>
-          <a:srgbClr val="FBFBF8"/>
+          <a:srgbClr val="FFFFFF"/>
         </a:solidFill>
       </p:bgPr>
     </p:bg>
@@ -1811,7 +1811,7 @@
             <a:r>
               <a:rPr lang="en-US" sz="2600" b="1" dirty="0">
                 <a:solidFill>
-                  <a:srgbClr val="240509"/>
+                  <a:srgbClr val="1F0318"/>
                 </a:solidFill>
                 <a:latin typeface="Arial" pitchFamily="34" charset="0"/>
                 <a:ea typeface="Arial" pitchFamily="34" charset="-122"/>
@@ -1870,7 +1870,7 @@
             <a:r>
               <a:rPr lang="en-US" sz="1800" b="1" dirty="0">
                 <a:solidFill>
-                  <a:srgbClr val="FBFBF8"/>
+                  <a:srgbClr val="FFFFFF"/>
                 </a:solidFill>
                 <a:latin typeface="Arial" pitchFamily="34" charset="0"/>
                 <a:ea typeface="Arial" pitchFamily="34" charset="-122"/>
@@ -1909,7 +1909,7 @@
             <a:r>
               <a:rPr lang="en-US" sz="1600" b="1" dirty="0">
                 <a:solidFill>
-                  <a:srgbClr val="240509"/>
+                  <a:srgbClr val="1F0318"/>
                 </a:solidFill>
                 <a:latin typeface="Arial" pitchFamily="34" charset="0"/>
                 <a:ea typeface="Arial" pitchFamily="34" charset="-122"/>
@@ -2007,7 +2007,7 @@
             <a:r>
               <a:rPr lang="en-US" sz="1800" b="1" dirty="0">
                 <a:solidFill>
-                  <a:srgbClr val="FBFBF8"/>
+                  <a:srgbClr val="FFFFFF"/>
                 </a:solidFill>
                 <a:latin typeface="Arial" pitchFamily="34" charset="0"/>
                 <a:ea typeface="Arial" pitchFamily="34" charset="-122"/>
@@ -2046,7 +2046,7 @@
             <a:r>
               <a:rPr lang="en-US" sz="1600" b="1" dirty="0">
                 <a:solidFill>
-                  <a:srgbClr val="240509"/>
+                  <a:srgbClr val="1F0318"/>
                 </a:solidFill>
                 <a:latin typeface="Arial" pitchFamily="34" charset="0"/>
                 <a:ea typeface="Arial" pitchFamily="34" charset="-122"/>
@@ -2144,7 +2144,7 @@
             <a:r>
               <a:rPr lang="en-US" sz="1800" b="1" dirty="0">
                 <a:solidFill>
-                  <a:srgbClr val="FBFBF8"/>
+                  <a:srgbClr val="FFFFFF"/>
                 </a:solidFill>
                 <a:latin typeface="Arial" pitchFamily="34" charset="0"/>
                 <a:ea typeface="Arial" pitchFamily="34" charset="-122"/>
@@ -2183,7 +2183,7 @@
             <a:r>
               <a:rPr lang="en-US" sz="1600" b="1" dirty="0">
                 <a:solidFill>
-                  <a:srgbClr val="240509"/>
+                  <a:srgbClr val="1F0318"/>
                 </a:solidFill>
                 <a:latin typeface="Arial" pitchFamily="34" charset="0"/>
                 <a:ea typeface="Arial" pitchFamily="34" charset="-122"/>
@@ -2248,7 +2248,7 @@
     <p:bg>
       <p:bgPr>
         <a:solidFill>
-          <a:srgbClr val="FBFBF8"/>
+          <a:srgbClr val="FFFFFF"/>
         </a:solidFill>
       </p:bgPr>
     </p:bg>
@@ -2293,7 +2293,7 @@
             <a:r>
               <a:rPr lang="en-US" sz="2600" b="1" dirty="0">
                 <a:solidFill>
-                  <a:srgbClr val="240509"/>
+                  <a:srgbClr val="1F0318"/>
                 </a:solidFill>
                 <a:latin typeface="Arial" pitchFamily="34" charset="0"/>
                 <a:ea typeface="Arial" pitchFamily="34" charset="-122"/>
@@ -2352,7 +2352,7 @@
             <a:r>
               <a:rPr lang="en-US" sz="1800" b="1" dirty="0">
                 <a:solidFill>
-                  <a:srgbClr val="FBFBF8"/>
+                  <a:srgbClr val="FFFFFF"/>
                 </a:solidFill>
                 <a:latin typeface="Arial" pitchFamily="34" charset="0"/>
                 <a:ea typeface="Arial" pitchFamily="34" charset="-122"/>
@@ -2391,7 +2391,7 @@
             <a:r>
               <a:rPr lang="en-US" sz="1600" b="1" dirty="0">
                 <a:solidFill>
-                  <a:srgbClr val="240509"/>
+                  <a:srgbClr val="1F0318"/>
                 </a:solidFill>
                 <a:latin typeface="Arial" pitchFamily="34" charset="0"/>
                 <a:ea typeface="Arial" pitchFamily="34" charset="-122"/>
@@ -2489,7 +2489,7 @@
             <a:r>
               <a:rPr lang="en-US" sz="1800" b="1" dirty="0">
                 <a:solidFill>
-                  <a:srgbClr val="FBFBF8"/>
+                  <a:srgbClr val="FFFFFF"/>
                 </a:solidFill>
                 <a:latin typeface="Arial" pitchFamily="34" charset="0"/>
                 <a:ea typeface="Arial" pitchFamily="34" charset="-122"/>
@@ -2528,7 +2528,7 @@
             <a:r>
               <a:rPr lang="en-US" sz="1600" b="1" dirty="0">
                 <a:solidFill>
-                  <a:srgbClr val="240509"/>
+                  <a:srgbClr val="1F0318"/>
                 </a:solidFill>
                 <a:latin typeface="Arial" pitchFamily="34" charset="0"/>
                 <a:ea typeface="Arial" pitchFamily="34" charset="-122"/>
@@ -2638,7 +2638,7 @@
             <a:r>
               <a:rPr lang="en-US" sz="1600" b="1" dirty="0">
                 <a:solidFill>
-                  <a:srgbClr val="240509"/>
+                  <a:srgbClr val="1F0318"/>
                 </a:solidFill>
                 <a:latin typeface="Arial" pitchFamily="34" charset="0"/>
                 <a:ea typeface="Arial" pitchFamily="34" charset="-122"/>
@@ -2677,7 +2677,7 @@
             <a:r>
               <a:rPr lang="en-US" sz="2400" b="1" dirty="0">
                 <a:solidFill>
-                  <a:srgbClr val="FBFBF8"/>
+                  <a:srgbClr val="FFFFFF"/>
                 </a:solidFill>
                 <a:latin typeface="Arial" pitchFamily="34" charset="0"/>
                 <a:ea typeface="Arial" pitchFamily="34" charset="-122"/>
